--- a/경상국립대학교_규정통합검색_사용자안내.pptx
+++ b/경상국립대학교_규정통합검색_사용자안내.pptx
@@ -4790,8 +4790,8 @@
         </p:nvSpPr>
         <p:spPr>
           <a:xfrm>
-            <a:off x="8321040" y="1737360"/>
-            <a:ext cx="3291840" cy="4114800"/>
+            <a:off x="8046720" y="1737360"/>
+            <a:ext cx="3749039" cy="4114800"/>
           </a:xfrm>
           <a:prstGeom prst="rect">
             <a:avLst/>
@@ -5182,8 +5182,8 @@
         </p:nvSpPr>
         <p:spPr>
           <a:xfrm>
-            <a:off x="8321040" y="1737360"/>
-            <a:ext cx="3291840" cy="4114800"/>
+            <a:off x="8046720" y="1737360"/>
+            <a:ext cx="3749039" cy="4114800"/>
           </a:xfrm>
           <a:prstGeom prst="rect">
             <a:avLst/>
@@ -5211,7 +5211,7 @@
                 </a:solidFill>
                 <a:latin typeface="맑은 고딕"/>
               </a:rPr>
-              <a:t>•  '전체 / 대학 / 산학협력단' 중 선택</a:t>
+              <a:t>•  전체·대학·산학협력단 중 선택</a:t>
             </a:r>
           </a:p>
           <a:p>
@@ -5584,8 +5584,8 @@
         </p:nvSpPr>
         <p:spPr>
           <a:xfrm>
-            <a:off x="8321040" y="1737360"/>
-            <a:ext cx="3291840" cy="4114800"/>
+            <a:off x="8046720" y="1737360"/>
+            <a:ext cx="3749039" cy="4114800"/>
           </a:xfrm>
           <a:prstGeom prst="rect">
             <a:avLst/>
@@ -6083,7 +6083,7 @@
                 </a:solidFill>
                 <a:latin typeface="맑은 고딕"/>
               </a:rPr>
-              <a:t>Q. 우리 부서 규정이 안 보여요.</a:t>
+              <a:t>Q. 우리 부서 이전 규정이 안 보여요.</a:t>
             </a:r>
           </a:p>
         </p:txBody>

--- a/경상국립대학교_규정통합검색_사용자안내.pptx
+++ b/경상국립대학교_규정통합검색_사용자안내.pptx
@@ -3905,7 +3905,7 @@
                 </a:solidFill>
                 <a:latin typeface="맑은 고딕"/>
               </a:rPr>
-              <a:t>0원</a:t>
+              <a:t>3단계</a:t>
             </a:r>
           </a:p>
         </p:txBody>
@@ -3944,7 +3944,7 @@
                 </a:solidFill>
                 <a:latin typeface="맑은 고딕"/>
               </a:rPr>
-              <a:t>로그인·설치 없이 바로 이용</a:t>
+              <a:t>검색창 입력 → 결과 확인, 끝</a:t>
             </a:r>
           </a:p>
         </p:txBody>

--- a/경상국립대학교_규정통합검색_사용자안내.pptx
+++ b/경상국립대학교_규정통합검색_사용자안내.pptx
@@ -5,16 +5,16 @@
     <p:sldMasterId id="2147483648" r:id="rId1"/>
   </p:sldMasterIdLst>
   <p:sldIdLst>
-    <p:sldId id="256" r:id="rId7"/>
-    <p:sldId id="257" r:id="rId8"/>
-    <p:sldId id="258" r:id="rId9"/>
-    <p:sldId id="259" r:id="rId10"/>
-    <p:sldId id="260" r:id="rId11"/>
-    <p:sldId id="261" r:id="rId12"/>
-    <p:sldId id="262" r:id="rId13"/>
-    <p:sldId id="263" r:id="rId14"/>
+    <p:sldId id="256" r:id="rId2"/>
+    <p:sldId id="257" r:id="rId3"/>
+    <p:sldId id="258" r:id="rId4"/>
+    <p:sldId id="259" r:id="rId5"/>
+    <p:sldId id="260" r:id="rId6"/>
+    <p:sldId id="261" r:id="rId7"/>
+    <p:sldId id="262" r:id="rId8"/>
+    <p:sldId id="263" r:id="rId9"/>
   </p:sldIdLst>
-  <p:sldSz cx="12191695" cy="6858000" type="screen4x3"/>
+  <p:sldSz cx="12192000" cy="6858000"/>
   <p:notesSz cx="6858000" cy="9144000"/>
   <p:defaultTextStyle>
     <a:defPPr>
@@ -111,6 +111,22 @@
       </a:defRPr>
     </a:lvl9pPr>
   </p:defaultTextStyle>
+  <p:extLst>
+    <p:ext uri="{EFAFB233-063F-42B5-8137-9DF3F51BA10A}">
+      <p15:sldGuideLst xmlns:p15="http://schemas.microsoft.com/office/powerpoint/2012/main">
+        <p15:guide id="1" orient="horz" pos="2160">
+          <p15:clr>
+            <a:srgbClr val="A4A3A4"/>
+          </p15:clr>
+        </p15:guide>
+        <p15:guide id="2" pos="2880">
+          <p15:clr>
+            <a:srgbClr val="A4A3A4"/>
+          </p15:clr>
+        </p15:guide>
+      </p15:sldGuideLst>
+    </p:ext>
+  </p:extLst>
 </p:presentation>
 </file>
 
@@ -152,10 +168,9 @@
           <a:lstStyle/>
           <a:p>
             <a:r>
-              <a:rPr lang="en-US" smtClean="0"/>
+              <a:rPr lang="en-US"/>
               <a:t>Click to edit Master title style</a:t>
             </a:r>
-            <a:endParaRPr lang="en-US"/>
           </a:p>
         </p:txBody>
       </p:sp>
@@ -271,10 +286,9 @@
           </a:lstStyle>
           <a:p>
             <a:r>
-              <a:rPr lang="en-US" smtClean="0"/>
+              <a:rPr lang="en-US"/>
               <a:t>Click to edit Master subtitle style</a:t>
             </a:r>
-            <a:endParaRPr lang="en-US"/>
           </a:p>
         </p:txBody>
       </p:sp>
@@ -295,7 +309,7 @@
           <a:p>
             <a:fld id="{5BCAD085-E8A6-8845-BD4E-CB4CCA059FC4}" type="datetimeFigureOut">
               <a:rPr lang="en-US" smtClean="0"/>
-              <a:t>1/27/13</a:t>
+              <a:t>10/7/2026</a:t>
             </a:fld>
             <a:endParaRPr lang="en-US"/>
           </a:p>
@@ -389,10 +403,9 @@
           <a:lstStyle/>
           <a:p>
             <a:r>
-              <a:rPr lang="en-US" smtClean="0"/>
+              <a:rPr lang="en-US"/>
               <a:t>Click to edit Master title style</a:t>
             </a:r>
-            <a:endParaRPr lang="en-US"/>
           </a:p>
         </p:txBody>
       </p:sp>
@@ -413,38 +426,37 @@
           <a:p>
             <a:pPr lvl="0"/>
             <a:r>
-              <a:rPr lang="en-US" smtClean="0"/>
+              <a:rPr lang="en-US"/>
               <a:t>Click to edit Master text styles</a:t>
             </a:r>
           </a:p>
           <a:p>
             <a:pPr lvl="1"/>
             <a:r>
-              <a:rPr lang="en-US" smtClean="0"/>
+              <a:rPr lang="en-US"/>
               <a:t>Second level</a:t>
             </a:r>
           </a:p>
           <a:p>
             <a:pPr lvl="2"/>
             <a:r>
-              <a:rPr lang="en-US" smtClean="0"/>
+              <a:rPr lang="en-US"/>
               <a:t>Third level</a:t>
             </a:r>
           </a:p>
           <a:p>
             <a:pPr lvl="3"/>
             <a:r>
-              <a:rPr lang="en-US" smtClean="0"/>
+              <a:rPr lang="en-US"/>
               <a:t>Fourth level</a:t>
             </a:r>
           </a:p>
           <a:p>
             <a:pPr lvl="4"/>
             <a:r>
-              <a:rPr lang="en-US" smtClean="0"/>
+              <a:rPr lang="en-US"/>
               <a:t>Fifth level</a:t>
             </a:r>
-            <a:endParaRPr lang="en-US"/>
           </a:p>
         </p:txBody>
       </p:sp>
@@ -465,7 +477,7 @@
           <a:p>
             <a:fld id="{5BCAD085-E8A6-8845-BD4E-CB4CCA059FC4}" type="datetimeFigureOut">
               <a:rPr lang="en-US" smtClean="0"/>
-              <a:t>1/27/13</a:t>
+              <a:t>10/7/2026</a:t>
             </a:fld>
             <a:endParaRPr lang="en-US"/>
           </a:p>
@@ -564,10 +576,9 @@
           <a:lstStyle/>
           <a:p>
             <a:r>
-              <a:rPr lang="en-US" smtClean="0"/>
+              <a:rPr lang="en-US"/>
               <a:t>Click to edit Master title style</a:t>
             </a:r>
-            <a:endParaRPr lang="en-US"/>
           </a:p>
         </p:txBody>
       </p:sp>
@@ -593,38 +604,37 @@
           <a:p>
             <a:pPr lvl="0"/>
             <a:r>
-              <a:rPr lang="en-US" smtClean="0"/>
+              <a:rPr lang="en-US"/>
               <a:t>Click to edit Master text styles</a:t>
             </a:r>
           </a:p>
           <a:p>
             <a:pPr lvl="1"/>
             <a:r>
-              <a:rPr lang="en-US" smtClean="0"/>
+              <a:rPr lang="en-US"/>
               <a:t>Second level</a:t>
             </a:r>
           </a:p>
           <a:p>
             <a:pPr lvl="2"/>
             <a:r>
-              <a:rPr lang="en-US" smtClean="0"/>
+              <a:rPr lang="en-US"/>
               <a:t>Third level</a:t>
             </a:r>
           </a:p>
           <a:p>
             <a:pPr lvl="3"/>
             <a:r>
-              <a:rPr lang="en-US" smtClean="0"/>
+              <a:rPr lang="en-US"/>
               <a:t>Fourth level</a:t>
             </a:r>
           </a:p>
           <a:p>
             <a:pPr lvl="4"/>
             <a:r>
-              <a:rPr lang="en-US" smtClean="0"/>
+              <a:rPr lang="en-US"/>
               <a:t>Fifth level</a:t>
             </a:r>
-            <a:endParaRPr lang="en-US"/>
           </a:p>
         </p:txBody>
       </p:sp>
@@ -645,7 +655,7 @@
           <a:p>
             <a:fld id="{5BCAD085-E8A6-8845-BD4E-CB4CCA059FC4}" type="datetimeFigureOut">
               <a:rPr lang="en-US" smtClean="0"/>
-              <a:t>1/27/13</a:t>
+              <a:t>10/7/2026</a:t>
             </a:fld>
             <a:endParaRPr lang="en-US"/>
           </a:p>
@@ -739,10 +749,9 @@
           <a:lstStyle/>
           <a:p>
             <a:r>
-              <a:rPr lang="en-US" smtClean="0"/>
+              <a:rPr lang="en-US"/>
               <a:t>Click to edit Master title style</a:t>
             </a:r>
-            <a:endParaRPr lang="en-US"/>
           </a:p>
         </p:txBody>
       </p:sp>
@@ -763,38 +772,37 @@
           <a:p>
             <a:pPr lvl="0"/>
             <a:r>
-              <a:rPr lang="en-US" smtClean="0"/>
+              <a:rPr lang="en-US"/>
               <a:t>Click to edit Master text styles</a:t>
             </a:r>
           </a:p>
           <a:p>
             <a:pPr lvl="1"/>
             <a:r>
-              <a:rPr lang="en-US" smtClean="0"/>
+              <a:rPr lang="en-US"/>
               <a:t>Second level</a:t>
             </a:r>
           </a:p>
           <a:p>
             <a:pPr lvl="2"/>
             <a:r>
-              <a:rPr lang="en-US" smtClean="0"/>
+              <a:rPr lang="en-US"/>
               <a:t>Third level</a:t>
             </a:r>
           </a:p>
           <a:p>
             <a:pPr lvl="3"/>
             <a:r>
-              <a:rPr lang="en-US" smtClean="0"/>
+              <a:rPr lang="en-US"/>
               <a:t>Fourth level</a:t>
             </a:r>
           </a:p>
           <a:p>
             <a:pPr lvl="4"/>
             <a:r>
-              <a:rPr lang="en-US" smtClean="0"/>
+              <a:rPr lang="en-US"/>
               <a:t>Fifth level</a:t>
             </a:r>
-            <a:endParaRPr lang="en-US"/>
           </a:p>
         </p:txBody>
       </p:sp>
@@ -815,7 +823,7 @@
           <a:p>
             <a:fld id="{5BCAD085-E8A6-8845-BD4E-CB4CCA059FC4}" type="datetimeFigureOut">
               <a:rPr lang="en-US" smtClean="0"/>
-              <a:t>1/27/13</a:t>
+              <a:t>10/7/2026</a:t>
             </a:fld>
             <a:endParaRPr lang="en-US"/>
           </a:p>
@@ -918,10 +926,9 @@
           </a:lstStyle>
           <a:p>
             <a:r>
-              <a:rPr lang="en-US" smtClean="0"/>
+              <a:rPr lang="en-US"/>
               <a:t>Click to edit Master title style</a:t>
             </a:r>
-            <a:endParaRPr lang="en-US"/>
           </a:p>
         </p:txBody>
       </p:sp>
@@ -1038,7 +1045,7 @@
           <a:p>
             <a:pPr lvl="0"/>
             <a:r>
-              <a:rPr lang="en-US" smtClean="0"/>
+              <a:rPr lang="en-US"/>
               <a:t>Click to edit Master text styles</a:t>
             </a:r>
           </a:p>
@@ -1061,7 +1068,7 @@
           <a:p>
             <a:fld id="{5BCAD085-E8A6-8845-BD4E-CB4CCA059FC4}" type="datetimeFigureOut">
               <a:rPr lang="en-US" smtClean="0"/>
-              <a:t>1/27/13</a:t>
+              <a:t>10/7/2026</a:t>
             </a:fld>
             <a:endParaRPr lang="en-US"/>
           </a:p>
@@ -1155,10 +1162,9 @@
           <a:lstStyle/>
           <a:p>
             <a:r>
-              <a:rPr lang="en-US" smtClean="0"/>
+              <a:rPr lang="en-US"/>
               <a:t>Click to edit Master title style</a:t>
             </a:r>
-            <a:endParaRPr lang="en-US"/>
           </a:p>
         </p:txBody>
       </p:sp>
@@ -1212,38 +1218,37 @@
           <a:p>
             <a:pPr lvl="0"/>
             <a:r>
-              <a:rPr lang="en-US" smtClean="0"/>
+              <a:rPr lang="en-US"/>
               <a:t>Click to edit Master text styles</a:t>
             </a:r>
           </a:p>
           <a:p>
             <a:pPr lvl="1"/>
             <a:r>
-              <a:rPr lang="en-US" smtClean="0"/>
+              <a:rPr lang="en-US"/>
               <a:t>Second level</a:t>
             </a:r>
           </a:p>
           <a:p>
             <a:pPr lvl="2"/>
             <a:r>
-              <a:rPr lang="en-US" smtClean="0"/>
+              <a:rPr lang="en-US"/>
               <a:t>Third level</a:t>
             </a:r>
           </a:p>
           <a:p>
             <a:pPr lvl="3"/>
             <a:r>
-              <a:rPr lang="en-US" smtClean="0"/>
+              <a:rPr lang="en-US"/>
               <a:t>Fourth level</a:t>
             </a:r>
           </a:p>
           <a:p>
             <a:pPr lvl="4"/>
             <a:r>
-              <a:rPr lang="en-US" smtClean="0"/>
+              <a:rPr lang="en-US"/>
               <a:t>Fifth level</a:t>
             </a:r>
-            <a:endParaRPr lang="en-US"/>
           </a:p>
         </p:txBody>
       </p:sp>
@@ -1297,38 +1302,37 @@
           <a:p>
             <a:pPr lvl="0"/>
             <a:r>
-              <a:rPr lang="en-US" smtClean="0"/>
+              <a:rPr lang="en-US"/>
               <a:t>Click to edit Master text styles</a:t>
             </a:r>
           </a:p>
           <a:p>
             <a:pPr lvl="1"/>
             <a:r>
-              <a:rPr lang="en-US" smtClean="0"/>
+              <a:rPr lang="en-US"/>
               <a:t>Second level</a:t>
             </a:r>
           </a:p>
           <a:p>
             <a:pPr lvl="2"/>
             <a:r>
-              <a:rPr lang="en-US" smtClean="0"/>
+              <a:rPr lang="en-US"/>
               <a:t>Third level</a:t>
             </a:r>
           </a:p>
           <a:p>
             <a:pPr lvl="3"/>
             <a:r>
-              <a:rPr lang="en-US" smtClean="0"/>
+              <a:rPr lang="en-US"/>
               <a:t>Fourth level</a:t>
             </a:r>
           </a:p>
           <a:p>
             <a:pPr lvl="4"/>
             <a:r>
-              <a:rPr lang="en-US" smtClean="0"/>
+              <a:rPr lang="en-US"/>
               <a:t>Fifth level</a:t>
             </a:r>
-            <a:endParaRPr lang="en-US"/>
           </a:p>
         </p:txBody>
       </p:sp>
@@ -1349,7 +1353,7 @@
           <a:p>
             <a:fld id="{5BCAD085-E8A6-8845-BD4E-CB4CCA059FC4}" type="datetimeFigureOut">
               <a:rPr lang="en-US" smtClean="0"/>
-              <a:t>1/27/13</a:t>
+              <a:t>10/7/2026</a:t>
             </a:fld>
             <a:endParaRPr lang="en-US"/>
           </a:p>
@@ -1447,10 +1451,9 @@
           </a:lstStyle>
           <a:p>
             <a:r>
-              <a:rPr lang="en-US" smtClean="0"/>
+              <a:rPr lang="en-US"/>
               <a:t>Click to edit Master title style</a:t>
             </a:r>
-            <a:endParaRPr lang="en-US"/>
           </a:p>
         </p:txBody>
       </p:sp>
@@ -1513,7 +1516,7 @@
           <a:p>
             <a:pPr lvl="0"/>
             <a:r>
-              <a:rPr lang="en-US" smtClean="0"/>
+              <a:rPr lang="en-US"/>
               <a:t>Click to edit Master text styles</a:t>
             </a:r>
           </a:p>
@@ -1569,38 +1572,37 @@
           <a:p>
             <a:pPr lvl="0"/>
             <a:r>
-              <a:rPr lang="en-US" smtClean="0"/>
+              <a:rPr lang="en-US"/>
               <a:t>Click to edit Master text styles</a:t>
             </a:r>
           </a:p>
           <a:p>
             <a:pPr lvl="1"/>
             <a:r>
-              <a:rPr lang="en-US" smtClean="0"/>
+              <a:rPr lang="en-US"/>
               <a:t>Second level</a:t>
             </a:r>
           </a:p>
           <a:p>
             <a:pPr lvl="2"/>
             <a:r>
-              <a:rPr lang="en-US" smtClean="0"/>
+              <a:rPr lang="en-US"/>
               <a:t>Third level</a:t>
             </a:r>
           </a:p>
           <a:p>
             <a:pPr lvl="3"/>
             <a:r>
-              <a:rPr lang="en-US" smtClean="0"/>
+              <a:rPr lang="en-US"/>
               <a:t>Fourth level</a:t>
             </a:r>
           </a:p>
           <a:p>
             <a:pPr lvl="4"/>
             <a:r>
-              <a:rPr lang="en-US" smtClean="0"/>
+              <a:rPr lang="en-US"/>
               <a:t>Fifth level</a:t>
             </a:r>
-            <a:endParaRPr lang="en-US"/>
           </a:p>
         </p:txBody>
       </p:sp>
@@ -1663,7 +1665,7 @@
           <a:p>
             <a:pPr lvl="0"/>
             <a:r>
-              <a:rPr lang="en-US" smtClean="0"/>
+              <a:rPr lang="en-US"/>
               <a:t>Click to edit Master text styles</a:t>
             </a:r>
           </a:p>
@@ -1719,38 +1721,37 @@
           <a:p>
             <a:pPr lvl="0"/>
             <a:r>
-              <a:rPr lang="en-US" smtClean="0"/>
+              <a:rPr lang="en-US"/>
               <a:t>Click to edit Master text styles</a:t>
             </a:r>
           </a:p>
           <a:p>
             <a:pPr lvl="1"/>
             <a:r>
-              <a:rPr lang="en-US" smtClean="0"/>
+              <a:rPr lang="en-US"/>
               <a:t>Second level</a:t>
             </a:r>
           </a:p>
           <a:p>
             <a:pPr lvl="2"/>
             <a:r>
-              <a:rPr lang="en-US" smtClean="0"/>
+              <a:rPr lang="en-US"/>
               <a:t>Third level</a:t>
             </a:r>
           </a:p>
           <a:p>
             <a:pPr lvl="3"/>
             <a:r>
-              <a:rPr lang="en-US" smtClean="0"/>
+              <a:rPr lang="en-US"/>
               <a:t>Fourth level</a:t>
             </a:r>
           </a:p>
           <a:p>
             <a:pPr lvl="4"/>
             <a:r>
-              <a:rPr lang="en-US" smtClean="0"/>
+              <a:rPr lang="en-US"/>
               <a:t>Fifth level</a:t>
             </a:r>
-            <a:endParaRPr lang="en-US"/>
           </a:p>
         </p:txBody>
       </p:sp>
@@ -1771,7 +1772,7 @@
           <a:p>
             <a:fld id="{5BCAD085-E8A6-8845-BD4E-CB4CCA059FC4}" type="datetimeFigureOut">
               <a:rPr lang="en-US" smtClean="0"/>
-              <a:t>1/27/13</a:t>
+              <a:t>10/7/2026</a:t>
             </a:fld>
             <a:endParaRPr lang="en-US"/>
           </a:p>
@@ -1865,10 +1866,9 @@
           <a:lstStyle/>
           <a:p>
             <a:r>
-              <a:rPr lang="en-US" smtClean="0"/>
+              <a:rPr lang="en-US"/>
               <a:t>Click to edit Master title style</a:t>
             </a:r>
-            <a:endParaRPr lang="en-US"/>
           </a:p>
         </p:txBody>
       </p:sp>
@@ -1889,7 +1889,7 @@
           <a:p>
             <a:fld id="{5BCAD085-E8A6-8845-BD4E-CB4CCA059FC4}" type="datetimeFigureOut">
               <a:rPr lang="en-US" smtClean="0"/>
-              <a:t>1/27/13</a:t>
+              <a:t>10/7/2026</a:t>
             </a:fld>
             <a:endParaRPr lang="en-US"/>
           </a:p>
@@ -1984,7 +1984,7 @@
           <a:p>
             <a:fld id="{5BCAD085-E8A6-8845-BD4E-CB4CCA059FC4}" type="datetimeFigureOut">
               <a:rPr lang="en-US" smtClean="0"/>
-              <a:t>1/27/13</a:t>
+              <a:t>10/7/2026</a:t>
             </a:fld>
             <a:endParaRPr lang="en-US"/>
           </a:p>
@@ -2087,10 +2087,9 @@
           </a:lstStyle>
           <a:p>
             <a:r>
-              <a:rPr lang="en-US" smtClean="0"/>
+              <a:rPr lang="en-US"/>
               <a:t>Click to edit Master title style</a:t>
             </a:r>
-            <a:endParaRPr lang="en-US"/>
           </a:p>
         </p:txBody>
       </p:sp>
@@ -2144,38 +2143,37 @@
           <a:p>
             <a:pPr lvl="0"/>
             <a:r>
-              <a:rPr lang="en-US" smtClean="0"/>
+              <a:rPr lang="en-US"/>
               <a:t>Click to edit Master text styles</a:t>
             </a:r>
           </a:p>
           <a:p>
             <a:pPr lvl="1"/>
             <a:r>
-              <a:rPr lang="en-US" smtClean="0"/>
+              <a:rPr lang="en-US"/>
               <a:t>Second level</a:t>
             </a:r>
           </a:p>
           <a:p>
             <a:pPr lvl="2"/>
             <a:r>
-              <a:rPr lang="en-US" smtClean="0"/>
+              <a:rPr lang="en-US"/>
               <a:t>Third level</a:t>
             </a:r>
           </a:p>
           <a:p>
             <a:pPr lvl="3"/>
             <a:r>
-              <a:rPr lang="en-US" smtClean="0"/>
+              <a:rPr lang="en-US"/>
               <a:t>Fourth level</a:t>
             </a:r>
           </a:p>
           <a:p>
             <a:pPr lvl="4"/>
             <a:r>
-              <a:rPr lang="en-US" smtClean="0"/>
+              <a:rPr lang="en-US"/>
               <a:t>Fifth level</a:t>
             </a:r>
-            <a:endParaRPr lang="en-US"/>
           </a:p>
         </p:txBody>
       </p:sp>
@@ -2238,7 +2236,7 @@
           <a:p>
             <a:pPr lvl="0"/>
             <a:r>
-              <a:rPr lang="en-US" smtClean="0"/>
+              <a:rPr lang="en-US"/>
               <a:t>Click to edit Master text styles</a:t>
             </a:r>
           </a:p>
@@ -2261,7 +2259,7 @@
           <a:p>
             <a:fld id="{5BCAD085-E8A6-8845-BD4E-CB4CCA059FC4}" type="datetimeFigureOut">
               <a:rPr lang="en-US" smtClean="0"/>
-              <a:t>1/27/13</a:t>
+              <a:t>10/7/2026</a:t>
             </a:fld>
             <a:endParaRPr lang="en-US"/>
           </a:p>
@@ -2364,10 +2362,9 @@
           </a:lstStyle>
           <a:p>
             <a:r>
-              <a:rPr lang="en-US" smtClean="0"/>
+              <a:rPr lang="en-US"/>
               <a:t>Click to edit Master title style</a:t>
             </a:r>
-            <a:endParaRPr lang="en-US"/>
           </a:p>
         </p:txBody>
       </p:sp>
@@ -2491,7 +2488,7 @@
           <a:p>
             <a:pPr lvl="0"/>
             <a:r>
-              <a:rPr lang="en-US" smtClean="0"/>
+              <a:rPr lang="en-US"/>
               <a:t>Click to edit Master text styles</a:t>
             </a:r>
           </a:p>
@@ -2514,7 +2511,7 @@
           <a:p>
             <a:fld id="{5BCAD085-E8A6-8845-BD4E-CB4CCA059FC4}" type="datetimeFigureOut">
               <a:rPr lang="en-US" smtClean="0"/>
-              <a:t>1/27/13</a:t>
+              <a:t>10/7/2026</a:t>
             </a:fld>
             <a:endParaRPr lang="en-US"/>
           </a:p>
@@ -2623,10 +2620,9 @@
           <a:lstStyle/>
           <a:p>
             <a:r>
-              <a:rPr lang="en-US" smtClean="0"/>
+              <a:rPr lang="en-US"/>
               <a:t>Click to edit Master title style</a:t>
             </a:r>
-            <a:endParaRPr lang="en-US"/>
           </a:p>
         </p:txBody>
       </p:sp>
@@ -2657,38 +2653,37 @@
           <a:p>
             <a:pPr lvl="0"/>
             <a:r>
-              <a:rPr lang="en-US" smtClean="0"/>
+              <a:rPr lang="en-US"/>
               <a:t>Click to edit Master text styles</a:t>
             </a:r>
           </a:p>
           <a:p>
             <a:pPr lvl="1"/>
             <a:r>
-              <a:rPr lang="en-US" smtClean="0"/>
+              <a:rPr lang="en-US"/>
               <a:t>Second level</a:t>
             </a:r>
           </a:p>
           <a:p>
             <a:pPr lvl="2"/>
             <a:r>
-              <a:rPr lang="en-US" smtClean="0"/>
+              <a:rPr lang="en-US"/>
               <a:t>Third level</a:t>
             </a:r>
           </a:p>
           <a:p>
             <a:pPr lvl="3"/>
             <a:r>
-              <a:rPr lang="en-US" smtClean="0"/>
+              <a:rPr lang="en-US"/>
               <a:t>Fourth level</a:t>
             </a:r>
           </a:p>
           <a:p>
             <a:pPr lvl="4"/>
             <a:r>
-              <a:rPr lang="en-US" smtClean="0"/>
+              <a:rPr lang="en-US"/>
               <a:t>Fifth level</a:t>
             </a:r>
-            <a:endParaRPr lang="en-US"/>
           </a:p>
         </p:txBody>
       </p:sp>
@@ -2727,7 +2722,7 @@
           <a:p>
             <a:fld id="{5BCAD085-E8A6-8845-BD4E-CB4CCA059FC4}" type="datetimeFigureOut">
               <a:rPr lang="en-US" smtClean="0"/>
-              <a:t>1/27/13</a:t>
+              <a:t>10/7/2026</a:t>
             </a:fld>
             <a:endParaRPr lang="en-US"/>
           </a:p>
@@ -3086,7 +3081,7 @@
 </file>
 
 <file path=ppt/slides/slide1.xml><?xml version="1.0" encoding="utf-8"?>
-<p:sld xmlns:a="http://schemas.openxmlformats.org/drawingml/2006/main" xmlns:p="http://schemas.openxmlformats.org/presentationml/2006/main" xmlns:r="http://schemas.openxmlformats.org/officeDocument/2006/relationships">
+<p:sld xmlns:a="http://schemas.openxmlformats.org/drawingml/2006/main" xmlns:r="http://schemas.openxmlformats.org/officeDocument/2006/relationships" xmlns:p="http://schemas.openxmlformats.org/presentationml/2006/main">
   <p:cSld>
     <p:spTree>
       <p:nvGrpSpPr>
@@ -3094,7 +3089,14 @@
         <p:cNvGrpSpPr/>
         <p:nvPr/>
       </p:nvGrpSpPr>
-      <p:grpSpPr/>
+      <p:grpSpPr>
+        <a:xfrm>
+          <a:off x="0" y="0"/>
+          <a:ext cx="0" cy="0"/>
+          <a:chOff x="0" y="0"/>
+          <a:chExt cx="0" cy="0"/>
+        </a:xfrm>
+      </p:grpSpPr>
       <p:sp>
         <p:nvSpPr>
           <p:cNvPr id="2" name="Rectangle 1"/>
@@ -3136,6 +3138,7 @@
           <a:lstStyle/>
           <a:p>
             <a:pPr algn="ctr"/>
+            <a:endParaRPr/>
           </a:p>
         </p:txBody>
       </p:sp>
@@ -3328,7 +3331,7 @@
 </file>
 
 <file path=ppt/slides/slide2.xml><?xml version="1.0" encoding="utf-8"?>
-<p:sld xmlns:a="http://schemas.openxmlformats.org/drawingml/2006/main" xmlns:p="http://schemas.openxmlformats.org/presentationml/2006/main" xmlns:r="http://schemas.openxmlformats.org/officeDocument/2006/relationships">
+<p:sld xmlns:a="http://schemas.openxmlformats.org/drawingml/2006/main" xmlns:r="http://schemas.openxmlformats.org/officeDocument/2006/relationships" xmlns:p="http://schemas.openxmlformats.org/presentationml/2006/main">
   <p:cSld>
     <p:spTree>
       <p:nvGrpSpPr>
@@ -3336,7 +3339,14 @@
         <p:cNvGrpSpPr/>
         <p:nvPr/>
       </p:nvGrpSpPr>
-      <p:grpSpPr/>
+      <p:grpSpPr>
+        <a:xfrm>
+          <a:off x="0" y="0"/>
+          <a:ext cx="0" cy="0"/>
+          <a:chOff x="0" y="0"/>
+          <a:chExt cx="0" cy="0"/>
+        </a:xfrm>
+      </p:grpSpPr>
       <p:sp>
         <p:nvSpPr>
           <p:cNvPr id="2" name="TextBox 1"/>
@@ -3456,6 +3466,7 @@
           <a:lstStyle/>
           <a:p>
             <a:pPr algn="ctr"/>
+            <a:endParaRPr/>
           </a:p>
         </p:txBody>
       </p:sp>
@@ -3620,6 +3631,7 @@
           <a:lstStyle/>
           <a:p>
             <a:pPr algn="ctr"/>
+            <a:endParaRPr/>
           </a:p>
         </p:txBody>
       </p:sp>
@@ -3744,6 +3756,7 @@
           <a:lstStyle/>
           <a:p>
             <a:pPr algn="ctr"/>
+            <a:endParaRPr/>
           </a:p>
         </p:txBody>
       </p:sp>
@@ -3868,6 +3881,7 @@
           <a:lstStyle/>
           <a:p>
             <a:pPr algn="ctr"/>
+            <a:endParaRPr/>
           </a:p>
         </p:txBody>
       </p:sp>
@@ -3880,7 +3894,7 @@
         <p:spPr>
           <a:xfrm>
             <a:off x="8061807" y="3291840"/>
-            <a:ext cx="3291840" cy="731520"/>
+            <a:ext cx="3291840" cy="574388"/>
           </a:xfrm>
           <a:prstGeom prst="rect">
             <a:avLst/>
@@ -3899,14 +3913,38 @@
               </a:lnSpc>
             </a:pPr>
             <a:r>
-              <a:rPr sz="3000" b="1">
+              <a:rPr lang="en-US" sz="3000" b="1" dirty="0">
                 <a:solidFill>
                   <a:srgbClr val="009EDB"/>
                 </a:solidFill>
                 <a:latin typeface="맑은 고딕"/>
               </a:rPr>
-              <a:t>3단계</a:t>
-            </a:r>
+              <a:t>1</a:t>
+            </a:r>
+            <a:r>
+              <a:rPr lang="ko-KR" altLang="en-US" sz="3000" b="1" dirty="0">
+                <a:solidFill>
+                  <a:srgbClr val="009EDB"/>
+                </a:solidFill>
+                <a:latin typeface="맑은 고딕"/>
+              </a:rPr>
+              <a:t>초</a:t>
+            </a:r>
+            <a:r>
+              <a:rPr lang="en-US" altLang="ko-KR" sz="3000" b="1" dirty="0">
+                <a:solidFill>
+                  <a:srgbClr val="009EDB"/>
+                </a:solidFill>
+                <a:latin typeface="맑은 고딕"/>
+              </a:rPr>
+              <a:t>-</a:t>
+            </a:r>
+            <a:endParaRPr sz="3000" b="1" dirty="0">
+              <a:solidFill>
+                <a:srgbClr val="009EDB"/>
+              </a:solidFill>
+              <a:latin typeface="맑은 고딕"/>
+            </a:endParaRPr>
           </a:p>
         </p:txBody>
       </p:sp>
@@ -3918,8 +3956,8 @@
         </p:nvSpPr>
         <p:spPr>
           <a:xfrm>
-            <a:off x="8061807" y="4023360"/>
-            <a:ext cx="3291840" cy="548640"/>
+            <a:off x="8133652" y="4114800"/>
+            <a:ext cx="3291840" cy="317331"/>
           </a:xfrm>
           <a:prstGeom prst="rect">
             <a:avLst/>
@@ -3938,14 +3976,38 @@
               </a:lnSpc>
             </a:pPr>
             <a:r>
-              <a:rPr sz="1400" b="0">
+              <a:rPr lang="ko-KR" altLang="en-US" sz="1400" b="0" dirty="0">
                 <a:solidFill>
                   <a:srgbClr val="43525A"/>
                 </a:solidFill>
                 <a:latin typeface="맑은 고딕"/>
               </a:rPr>
-              <a:t>검색창 입력 → 결과 확인, 끝</a:t>
-            </a:r>
+              <a:t>로그인</a:t>
+            </a:r>
+            <a:r>
+              <a:rPr lang="en-US" altLang="ko-KR" sz="1400" b="0" dirty="0">
+                <a:solidFill>
+                  <a:srgbClr val="43525A"/>
+                </a:solidFill>
+                <a:latin typeface="맑은 고딕"/>
+              </a:rPr>
+              <a:t>·</a:t>
+            </a:r>
+            <a:r>
+              <a:rPr lang="ko-KR" altLang="en-US" sz="1400" b="0" dirty="0">
+                <a:solidFill>
+                  <a:srgbClr val="43525A"/>
+                </a:solidFill>
+                <a:latin typeface="맑은 고딕"/>
+              </a:rPr>
+              <a:t>설치 없이 빠른 검색 속도</a:t>
+            </a:r>
+            <a:endParaRPr sz="1400" b="0" dirty="0">
+              <a:solidFill>
+                <a:srgbClr val="43525A"/>
+              </a:solidFill>
+              <a:latin typeface="맑은 고딕"/>
+            </a:endParaRPr>
           </a:p>
         </p:txBody>
       </p:sp>
@@ -4019,7 +4081,7 @@
 </file>
 
 <file path=ppt/slides/slide3.xml><?xml version="1.0" encoding="utf-8"?>
-<p:sld xmlns:a="http://schemas.openxmlformats.org/drawingml/2006/main" xmlns:p="http://schemas.openxmlformats.org/presentationml/2006/main" xmlns:r="http://schemas.openxmlformats.org/officeDocument/2006/relationships">
+<p:sld xmlns:a="http://schemas.openxmlformats.org/drawingml/2006/main" xmlns:r="http://schemas.openxmlformats.org/officeDocument/2006/relationships" xmlns:p="http://schemas.openxmlformats.org/presentationml/2006/main">
   <p:cSld>
     <p:spTree>
       <p:nvGrpSpPr>
@@ -4027,7 +4089,14 @@
         <p:cNvGrpSpPr/>
         <p:nvPr/>
       </p:nvGrpSpPr>
-      <p:grpSpPr/>
+      <p:grpSpPr>
+        <a:xfrm>
+          <a:off x="0" y="0"/>
+          <a:ext cx="0" cy="0"/>
+          <a:chOff x="0" y="0"/>
+          <a:chExt cx="0" cy="0"/>
+        </a:xfrm>
+      </p:grpSpPr>
       <p:sp>
         <p:nvSpPr>
           <p:cNvPr id="2" name="TextBox 1"/>
@@ -4147,6 +4216,7 @@
           <a:lstStyle/>
           <a:p>
             <a:pPr algn="ctr"/>
+            <a:endParaRPr/>
           </a:p>
         </p:txBody>
       </p:sp>
@@ -4232,8 +4302,20 @@
                 <a:tableStyleId>{5C22544A-7EE6-4342-B048-85BDC9FD1C3A}</a:tableStyleId>
               </a:tblPr>
               <a:tblGrid>
-                <a:gridCol w="2697480"/>
-                <a:gridCol w="8092440"/>
+                <a:gridCol w="2697480">
+                  <a:extLst>
+                    <a:ext uri="{9D8B030D-6E8A-4147-A177-3AD203B41FA5}">
+                      <a16:colId xmlns:a16="http://schemas.microsoft.com/office/drawing/2014/main" val="20000"/>
+                    </a:ext>
+                  </a:extLst>
+                </a:gridCol>
+                <a:gridCol w="8092440">
+                  <a:extLst>
+                    <a:ext uri="{9D8B030D-6E8A-4147-A177-3AD203B41FA5}">
+                      <a16:colId xmlns:a16="http://schemas.microsoft.com/office/drawing/2014/main" val="20001"/>
+                    </a:ext>
+                  </a:extLst>
+                </a:gridCol>
               </a:tblGrid>
               <a:tr h="548640">
                 <a:tc>
@@ -4243,7 +4325,7 @@
                     <a:p>
                       <a:pPr algn="ctr"/>
                       <a:r>
-                        <a:rPr b="1" sz="1600">
+                        <a:rPr sz="1600" b="1">
                           <a:solidFill>
                             <a:srgbClr val="FFFFFF"/>
                           </a:solidFill>
@@ -4266,7 +4348,7 @@
                     <a:p>
                       <a:pPr algn="ctr"/>
                       <a:r>
-                        <a:rPr b="1" sz="1600">
+                        <a:rPr sz="1600" b="1">
                           <a:solidFill>
                             <a:srgbClr val="FFFFFF"/>
                           </a:solidFill>
@@ -4282,6 +4364,11 @@
                     </a:solidFill>
                   </a:tcPr>
                 </a:tc>
+                <a:extLst>
+                  <a:ext uri="{0D108BD9-81ED-4DB2-BD59-A6C34878D82A}">
+                    <a16:rowId xmlns:a16="http://schemas.microsoft.com/office/drawing/2014/main" val="10000"/>
+                  </a:ext>
+                </a:extLst>
               </a:tr>
               <a:tr h="548640">
                 <a:tc>
@@ -4330,6 +4417,11 @@
                     </a:solidFill>
                   </a:tcPr>
                 </a:tc>
+                <a:extLst>
+                  <a:ext uri="{0D108BD9-81ED-4DB2-BD59-A6C34878D82A}">
+                    <a16:rowId xmlns:a16="http://schemas.microsoft.com/office/drawing/2014/main" val="10001"/>
+                  </a:ext>
+                </a:extLst>
               </a:tr>
               <a:tr h="548640">
                 <a:tc>
@@ -4378,6 +4470,11 @@
                     </a:solidFill>
                   </a:tcPr>
                 </a:tc>
+                <a:extLst>
+                  <a:ext uri="{0D108BD9-81ED-4DB2-BD59-A6C34878D82A}">
+                    <a16:rowId xmlns:a16="http://schemas.microsoft.com/office/drawing/2014/main" val="10002"/>
+                  </a:ext>
+                </a:extLst>
               </a:tr>
               <a:tr h="548640">
                 <a:tc>
@@ -4426,6 +4523,11 @@
                     </a:solidFill>
                   </a:tcPr>
                 </a:tc>
+                <a:extLst>
+                  <a:ext uri="{0D108BD9-81ED-4DB2-BD59-A6C34878D82A}">
+                    <a16:rowId xmlns:a16="http://schemas.microsoft.com/office/drawing/2014/main" val="10003"/>
+                  </a:ext>
+                </a:extLst>
               </a:tr>
             </a:tbl>
           </a:graphicData>
@@ -4479,7 +4581,7 @@
 </file>
 
 <file path=ppt/slides/slide4.xml><?xml version="1.0" encoding="utf-8"?>
-<p:sld xmlns:a="http://schemas.openxmlformats.org/drawingml/2006/main" xmlns:p="http://schemas.openxmlformats.org/presentationml/2006/main" xmlns:r="http://schemas.openxmlformats.org/officeDocument/2006/relationships">
+<p:sld xmlns:a="http://schemas.openxmlformats.org/drawingml/2006/main" xmlns:r="http://schemas.openxmlformats.org/officeDocument/2006/relationships" xmlns:p="http://schemas.openxmlformats.org/presentationml/2006/main">
   <p:cSld>
     <p:spTree>
       <p:nvGrpSpPr>
@@ -4487,7 +4589,14 @@
         <p:cNvGrpSpPr/>
         <p:nvPr/>
       </p:nvGrpSpPr>
-      <p:grpSpPr/>
+      <p:grpSpPr>
+        <a:xfrm>
+          <a:off x="0" y="0"/>
+          <a:ext cx="0" cy="0"/>
+          <a:chOff x="0" y="0"/>
+          <a:chExt cx="0" cy="0"/>
+        </a:xfrm>
+      </p:grpSpPr>
       <p:sp>
         <p:nvSpPr>
           <p:cNvPr id="2" name="TextBox 1"/>
@@ -4607,6 +4716,7 @@
           <a:lstStyle/>
           <a:p>
             <a:pPr algn="ctr"/>
+            <a:endParaRPr/>
           </a:p>
         </p:txBody>
       </p:sp>
@@ -4716,6 +4826,7 @@
           <a:lstStyle/>
           <a:p>
             <a:pPr algn="ctr"/>
+            <a:endParaRPr/>
           </a:p>
         </p:txBody>
       </p:sp>
@@ -4871,7 +4982,7 @@
 </file>
 
 <file path=ppt/slides/slide5.xml><?xml version="1.0" encoding="utf-8"?>
-<p:sld xmlns:a="http://schemas.openxmlformats.org/drawingml/2006/main" xmlns:p="http://schemas.openxmlformats.org/presentationml/2006/main" xmlns:r="http://schemas.openxmlformats.org/officeDocument/2006/relationships">
+<p:sld xmlns:a="http://schemas.openxmlformats.org/drawingml/2006/main" xmlns:r="http://schemas.openxmlformats.org/officeDocument/2006/relationships" xmlns:p="http://schemas.openxmlformats.org/presentationml/2006/main">
   <p:cSld>
     <p:spTree>
       <p:nvGrpSpPr>
@@ -4879,7 +4990,14 @@
         <p:cNvGrpSpPr/>
         <p:nvPr/>
       </p:nvGrpSpPr>
-      <p:grpSpPr/>
+      <p:grpSpPr>
+        <a:xfrm>
+          <a:off x="0" y="0"/>
+          <a:ext cx="0" cy="0"/>
+          <a:chOff x="0" y="0"/>
+          <a:chExt cx="0" cy="0"/>
+        </a:xfrm>
+      </p:grpSpPr>
       <p:sp>
         <p:nvSpPr>
           <p:cNvPr id="2" name="TextBox 1"/>
@@ -4999,6 +5117,7 @@
           <a:lstStyle/>
           <a:p>
             <a:pPr algn="ctr"/>
+            <a:endParaRPr/>
           </a:p>
         </p:txBody>
       </p:sp>
@@ -5108,6 +5227,7 @@
           <a:lstStyle/>
           <a:p>
             <a:pPr algn="ctr"/>
+            <a:endParaRPr/>
           </a:p>
         </p:txBody>
       </p:sp>
@@ -5273,7 +5393,7 @@
 </file>
 
 <file path=ppt/slides/slide6.xml><?xml version="1.0" encoding="utf-8"?>
-<p:sld xmlns:a="http://schemas.openxmlformats.org/drawingml/2006/main" xmlns:p="http://schemas.openxmlformats.org/presentationml/2006/main" xmlns:r="http://schemas.openxmlformats.org/officeDocument/2006/relationships">
+<p:sld xmlns:a="http://schemas.openxmlformats.org/drawingml/2006/main" xmlns:r="http://schemas.openxmlformats.org/officeDocument/2006/relationships" xmlns:p="http://schemas.openxmlformats.org/presentationml/2006/main">
   <p:cSld>
     <p:spTree>
       <p:nvGrpSpPr>
@@ -5281,7 +5401,14 @@
         <p:cNvGrpSpPr/>
         <p:nvPr/>
       </p:nvGrpSpPr>
-      <p:grpSpPr/>
+      <p:grpSpPr>
+        <a:xfrm>
+          <a:off x="0" y="0"/>
+          <a:ext cx="0" cy="0"/>
+          <a:chOff x="0" y="0"/>
+          <a:chExt cx="0" cy="0"/>
+        </a:xfrm>
+      </p:grpSpPr>
       <p:sp>
         <p:nvSpPr>
           <p:cNvPr id="2" name="TextBox 1"/>
@@ -5401,6 +5528,7 @@
           <a:lstStyle/>
           <a:p>
             <a:pPr algn="ctr"/>
+            <a:endParaRPr/>
           </a:p>
         </p:txBody>
       </p:sp>
@@ -5510,6 +5638,7 @@
           <a:lstStyle/>
           <a:p>
             <a:pPr algn="ctr"/>
+            <a:endParaRPr/>
           </a:p>
         </p:txBody>
       </p:sp>
@@ -5685,7 +5814,7 @@
 </file>
 
 <file path=ppt/slides/slide7.xml><?xml version="1.0" encoding="utf-8"?>
-<p:sld xmlns:a="http://schemas.openxmlformats.org/drawingml/2006/main" xmlns:p="http://schemas.openxmlformats.org/presentationml/2006/main" xmlns:r="http://schemas.openxmlformats.org/officeDocument/2006/relationships">
+<p:sld xmlns:a="http://schemas.openxmlformats.org/drawingml/2006/main" xmlns:r="http://schemas.openxmlformats.org/officeDocument/2006/relationships" xmlns:p="http://schemas.openxmlformats.org/presentationml/2006/main">
   <p:cSld>
     <p:spTree>
       <p:nvGrpSpPr>
@@ -5693,7 +5822,14 @@
         <p:cNvGrpSpPr/>
         <p:nvPr/>
       </p:nvGrpSpPr>
-      <p:grpSpPr/>
+      <p:grpSpPr>
+        <a:xfrm>
+          <a:off x="0" y="0"/>
+          <a:ext cx="0" cy="0"/>
+          <a:chOff x="0" y="0"/>
+          <a:chExt cx="0" cy="0"/>
+        </a:xfrm>
+      </p:grpSpPr>
       <p:sp>
         <p:nvSpPr>
           <p:cNvPr id="2" name="TextBox 1"/>
@@ -5813,6 +5949,7 @@
           <a:lstStyle/>
           <a:p>
             <a:pPr algn="ctr"/>
+            <a:endParaRPr/>
           </a:p>
         </p:txBody>
       </p:sp>
@@ -5922,6 +6059,7 @@
           <a:lstStyle/>
           <a:p>
             <a:pPr algn="ctr"/>
+            <a:endParaRPr/>
           </a:p>
         </p:txBody>
       </p:sp>
@@ -6046,6 +6184,7 @@
           <a:lstStyle/>
           <a:p>
             <a:pPr algn="ctr"/>
+            <a:endParaRPr/>
           </a:p>
         </p:txBody>
       </p:sp>
@@ -6058,7 +6197,7 @@
         <p:spPr>
           <a:xfrm>
             <a:off x="822960" y="3310128"/>
-            <a:ext cx="10515600" cy="365760"/>
+            <a:ext cx="10515600" cy="349391"/>
           </a:xfrm>
           <a:prstGeom prst="rect">
             <a:avLst/>
@@ -6077,13 +6216,112 @@
               </a:lnSpc>
             </a:pPr>
             <a:r>
-              <a:rPr sz="1600" b="1">
+              <a:rPr sz="1600" b="1" dirty="0">
                 <a:solidFill>
                   <a:srgbClr val="009EDB"/>
                 </a:solidFill>
                 <a:latin typeface="맑은 고딕"/>
               </a:rPr>
-              <a:t>Q. 우리 부서 이전 규정이 안 보여요.</a:t>
+              <a:t>Q. </a:t>
+            </a:r>
+            <a:r>
+              <a:rPr sz="1600" b="1" dirty="0" err="1">
+                <a:solidFill>
+                  <a:srgbClr val="009EDB"/>
+                </a:solidFill>
+                <a:latin typeface="맑은 고딕"/>
+              </a:rPr>
+              <a:t>우리</a:t>
+            </a:r>
+            <a:r>
+              <a:rPr sz="1600" b="1" dirty="0">
+                <a:solidFill>
+                  <a:srgbClr val="009EDB"/>
+                </a:solidFill>
+                <a:latin typeface="맑은 고딕"/>
+              </a:rPr>
+              <a:t> </a:t>
+            </a:r>
+            <a:r>
+              <a:rPr sz="1600" b="1" dirty="0" err="1">
+                <a:solidFill>
+                  <a:srgbClr val="009EDB"/>
+                </a:solidFill>
+                <a:latin typeface="맑은 고딕"/>
+              </a:rPr>
+              <a:t>부서</a:t>
+            </a:r>
+            <a:r>
+              <a:rPr lang="ko-KR" altLang="en-US" sz="1600" b="1" dirty="0">
+                <a:solidFill>
+                  <a:srgbClr val="009EDB"/>
+                </a:solidFill>
+                <a:latin typeface="맑은 고딕"/>
+              </a:rPr>
+              <a:t>의</a:t>
+            </a:r>
+            <a:r>
+              <a:rPr sz="1600" b="1" dirty="0">
+                <a:solidFill>
+                  <a:srgbClr val="009EDB"/>
+                </a:solidFill>
+                <a:latin typeface="맑은 고딕"/>
+              </a:rPr>
+              <a:t> </a:t>
+            </a:r>
+            <a:r>
+              <a:rPr sz="1600" b="1" dirty="0" err="1">
+                <a:solidFill>
+                  <a:srgbClr val="009EDB"/>
+                </a:solidFill>
+                <a:latin typeface="맑은 고딕"/>
+              </a:rPr>
+              <a:t>이전</a:t>
+            </a:r>
+            <a:r>
+              <a:rPr sz="1600" b="1" dirty="0">
+                <a:solidFill>
+                  <a:srgbClr val="009EDB"/>
+                </a:solidFill>
+                <a:latin typeface="맑은 고딕"/>
+              </a:rPr>
+              <a:t> </a:t>
+            </a:r>
+            <a:r>
+              <a:rPr sz="1600" b="1" dirty="0" err="1">
+                <a:solidFill>
+                  <a:srgbClr val="009EDB"/>
+                </a:solidFill>
+                <a:latin typeface="맑은 고딕"/>
+              </a:rPr>
+              <a:t>규정이</a:t>
+            </a:r>
+            <a:r>
+              <a:rPr sz="1600" b="1" dirty="0">
+                <a:solidFill>
+                  <a:srgbClr val="009EDB"/>
+                </a:solidFill>
+                <a:latin typeface="맑은 고딕"/>
+              </a:rPr>
+              <a:t> 안 </a:t>
+            </a:r>
+            <a:r>
+              <a:rPr sz="1600" b="1" dirty="0" err="1">
+                <a:solidFill>
+                  <a:srgbClr val="009EDB"/>
+                </a:solidFill>
+                <a:latin typeface="맑은 고딕"/>
+              </a:rPr>
+              <a:t>보여요</a:t>
+            </a:r>
+            <a:r>
+              <a:rPr sz="1600" b="1" dirty="0">
+                <a:solidFill>
+                  <a:srgbClr val="009EDB"/>
+                </a:solidFill>
+                <a:latin typeface="맑은 고딕"/>
+              </a:rPr>
+              <a:t>.</a:t>
             </a:r>
           </a:p>
         </p:txBody>
@@ -6170,6 +6408,7 @@
           <a:lstStyle/>
           <a:p>
             <a:pPr algn="ctr"/>
+            <a:endParaRPr/>
           </a:p>
         </p:txBody>
       </p:sp>
@@ -6260,7 +6499,7 @@
 </file>
 
 <file path=ppt/slides/slide8.xml><?xml version="1.0" encoding="utf-8"?>
-<p:sld xmlns:a="http://schemas.openxmlformats.org/drawingml/2006/main" xmlns:p="http://schemas.openxmlformats.org/presentationml/2006/main" xmlns:r="http://schemas.openxmlformats.org/officeDocument/2006/relationships">
+<p:sld xmlns:a="http://schemas.openxmlformats.org/drawingml/2006/main" xmlns:r="http://schemas.openxmlformats.org/officeDocument/2006/relationships" xmlns:p="http://schemas.openxmlformats.org/presentationml/2006/main">
   <p:cSld>
     <p:spTree>
       <p:nvGrpSpPr>
@@ -6268,7 +6507,14 @@
         <p:cNvGrpSpPr/>
         <p:nvPr/>
       </p:nvGrpSpPr>
-      <p:grpSpPr/>
+      <p:grpSpPr>
+        <a:xfrm>
+          <a:off x="0" y="0"/>
+          <a:ext cx="0" cy="0"/>
+          <a:chOff x="0" y="0"/>
+          <a:chExt cx="0" cy="0"/>
+        </a:xfrm>
+      </p:grpSpPr>
       <p:sp>
         <p:nvSpPr>
           <p:cNvPr id="2" name="TextBox 1"/>
@@ -6388,6 +6634,7 @@
           <a:lstStyle/>
           <a:p>
             <a:pPr algn="ctr"/>
+            <a:endParaRPr/>
           </a:p>
         </p:txBody>
       </p:sp>
@@ -6473,8 +6720,20 @@
                 <a:tableStyleId>{5C22544A-7EE6-4342-B048-85BDC9FD1C3A}</a:tableStyleId>
               </a:tblPr>
               <a:tblGrid>
-                <a:gridCol w="5532120"/>
-                <a:gridCol w="5532120"/>
+                <a:gridCol w="5532120">
+                  <a:extLst>
+                    <a:ext uri="{9D8B030D-6E8A-4147-A177-3AD203B41FA5}">
+                      <a16:colId xmlns:a16="http://schemas.microsoft.com/office/drawing/2014/main" val="20000"/>
+                    </a:ext>
+                  </a:extLst>
+                </a:gridCol>
+                <a:gridCol w="5532120">
+                  <a:extLst>
+                    <a:ext uri="{9D8B030D-6E8A-4147-A177-3AD203B41FA5}">
+                      <a16:colId xmlns:a16="http://schemas.microsoft.com/office/drawing/2014/main" val="20001"/>
+                    </a:ext>
+                  </a:extLst>
+                </a:gridCol>
               </a:tblGrid>
               <a:tr h="594360">
                 <a:tc>
@@ -6484,7 +6743,7 @@
                     <a:p>
                       <a:pPr algn="ctr"/>
                       <a:r>
-                        <a:rPr b="1" sz="1600">
+                        <a:rPr sz="1600" b="1">
                           <a:solidFill>
                             <a:srgbClr val="FFFFFF"/>
                           </a:solidFill>
@@ -6507,7 +6766,7 @@
                     <a:p>
                       <a:pPr algn="ctr"/>
                       <a:r>
-                        <a:rPr b="1" sz="1600">
+                        <a:rPr sz="1600" b="1">
                           <a:solidFill>
                             <a:srgbClr val="FFFFFF"/>
                           </a:solidFill>
@@ -6523,6 +6782,11 @@
                     </a:solidFill>
                   </a:tcPr>
                 </a:tc>
+                <a:extLst>
+                  <a:ext uri="{0D108BD9-81ED-4DB2-BD59-A6C34878D82A}">
+                    <a16:rowId xmlns:a16="http://schemas.microsoft.com/office/drawing/2014/main" val="10000"/>
+                  </a:ext>
+                </a:extLst>
               </a:tr>
               <a:tr h="594360">
                 <a:tc>
@@ -6571,6 +6835,11 @@
                     </a:solidFill>
                   </a:tcPr>
                 </a:tc>
+                <a:extLst>
+                  <a:ext uri="{0D108BD9-81ED-4DB2-BD59-A6C34878D82A}">
+                    <a16:rowId xmlns:a16="http://schemas.microsoft.com/office/drawing/2014/main" val="10001"/>
+                  </a:ext>
+                </a:extLst>
               </a:tr>
             </a:tbl>
           </a:graphicData>
